--- a/apresentacao/APRESENTACAO_FINAL_CORRIGIDA.pptx
+++ b/apresentacao/APRESENTACAO_FINAL_CORRIGIDA.pptx
@@ -4167,7 +4167,7 @@
                 <a:cs typeface="Noto Sans"/>
                 <a:sym typeface="Noto Sans"/>
               </a:rPr>
-              <a:t>O tradutor de Libras é injetado por barra.brasil.gov.br, não aparece no HTML entregue pelo servidor e passou fora das três frentes automatizadas.</a:t>
+              <a:t>O tradutor de Libras é injetado por barra.brasil.gov.br, não aparece no HTML entregue pelo servidor e passou fora de todas as frentes automatizadas.</a:t>
             </a:r>
           </a:p>
         </p:txBody>
@@ -4303,15 +4303,15 @@
         </p:nvSpPr>
         <p:spPr>
           <a:xfrm rot="0">
-            <a:off x="7090191" y="3275086"/>
-            <a:ext cx="318573" cy="148114"/>
-          </a:xfrm>
-          <a:prstGeom prst="rect">
-            <a:avLst/>
-          </a:prstGeom>
-        </p:spPr>
-        <p:txBody>
-          <a:bodyPr anchor="t" rtlCol="false" tIns="0" lIns="0" bIns="0" rIns="0">
+            <a:off x="7090257" y="3275086"/>
+            <a:ext cx="318211" cy="148114"/>
+          </a:xfrm>
+          <a:prstGeom prst="rect">
+            <a:avLst/>
+          </a:prstGeom>
+        </p:spPr>
+        <p:txBody>
+          <a:bodyPr anchor="t" rtlCol="false" tIns="0" lIns="0" bIns="0" rIns="0" wrap="none">
             <a:spAutoFit/>
           </a:bodyPr>
           <a:lstStyle/>
@@ -4344,15 +4344,15 @@
         </p:nvSpPr>
         <p:spPr>
           <a:xfrm rot="0">
-            <a:off x="6892557" y="4555246"/>
-            <a:ext cx="720442" cy="148114"/>
-          </a:xfrm>
-          <a:prstGeom prst="rect">
-            <a:avLst/>
-          </a:prstGeom>
-        </p:spPr>
-        <p:txBody>
-          <a:bodyPr anchor="t" rtlCol="false" tIns="0" lIns="0" bIns="0" rIns="0">
+            <a:off x="6892747" y="4555246"/>
+            <a:ext cx="720547" cy="148114"/>
+          </a:xfrm>
+          <a:prstGeom prst="rect">
+            <a:avLst/>
+          </a:prstGeom>
+        </p:spPr>
+        <p:txBody>
+          <a:bodyPr anchor="t" rtlCol="false" tIns="0" lIns="0" bIns="0" rIns="0" wrap="none">
             <a:spAutoFit/>
           </a:bodyPr>
           <a:lstStyle/>
@@ -4385,15 +4385,15 @@
         </p:nvSpPr>
         <p:spPr>
           <a:xfrm rot="0">
-            <a:off x="6809765" y="3915166"/>
-            <a:ext cx="889178" cy="148114"/>
-          </a:xfrm>
-          <a:prstGeom prst="rect">
-            <a:avLst/>
-          </a:prstGeom>
-        </p:spPr>
-        <p:txBody>
-          <a:bodyPr anchor="t" rtlCol="false" tIns="0" lIns="0" bIns="0" rIns="0">
+            <a:off x="6686092" y="3915166"/>
+            <a:ext cx="1135684" cy="148114"/>
+          </a:xfrm>
+          <a:prstGeom prst="rect">
+            <a:avLst/>
+          </a:prstGeom>
+        </p:spPr>
+        <p:txBody>
+          <a:bodyPr anchor="t" rtlCol="false" tIns="0" lIns="0" bIns="0" rIns="0" wrap="none">
             <a:spAutoFit/>
           </a:bodyPr>
           <a:lstStyle/>
@@ -4413,7 +4413,7 @@
                 <a:cs typeface="Noto Sans"/>
                 <a:sym typeface="Noto Sans"/>
               </a:rPr>
-              <a:t>4. região principal</a:t>
+              <a:t>4. cabeçalho da página</a:t>
             </a:r>
           </a:p>
         </p:txBody>
@@ -4426,15 +4426,15 @@
         </p:nvSpPr>
         <p:spPr>
           <a:xfrm rot="0">
-            <a:off x="8663035" y="3275086"/>
-            <a:ext cx="318573" cy="148114"/>
-          </a:xfrm>
-          <a:prstGeom prst="rect">
-            <a:avLst/>
-          </a:prstGeom>
-        </p:spPr>
-        <p:txBody>
-          <a:bodyPr anchor="t" rtlCol="false" tIns="0" lIns="0" bIns="0" rIns="0">
+            <a:off x="8663025" y="3275086"/>
+            <a:ext cx="318211" cy="148114"/>
+          </a:xfrm>
+          <a:prstGeom prst="rect">
+            <a:avLst/>
+          </a:prstGeom>
+        </p:spPr>
+        <p:txBody>
+          <a:bodyPr anchor="t" rtlCol="false" tIns="0" lIns="0" bIns="0" rIns="0" wrap="none">
             <a:spAutoFit/>
           </a:bodyPr>
           <a:lstStyle/>
@@ -4467,15 +4467,15 @@
         </p:nvSpPr>
         <p:spPr>
           <a:xfrm rot="0">
-            <a:off x="8465401" y="4555246"/>
-            <a:ext cx="720442" cy="148114"/>
-          </a:xfrm>
-          <a:prstGeom prst="rect">
-            <a:avLst/>
-          </a:prstGeom>
-        </p:spPr>
-        <p:txBody>
-          <a:bodyPr anchor="t" rtlCol="false" tIns="0" lIns="0" bIns="0" rIns="0">
+            <a:off x="8465515" y="4555246"/>
+            <a:ext cx="720547" cy="148114"/>
+          </a:xfrm>
+          <a:prstGeom prst="rect">
+            <a:avLst/>
+          </a:prstGeom>
+        </p:spPr>
+        <p:txBody>
+          <a:bodyPr anchor="t" rtlCol="false" tIns="0" lIns="0" bIns="0" rIns="0" wrap="none">
             <a:spAutoFit/>
           </a:bodyPr>
           <a:lstStyle/>
@@ -4508,15 +4508,15 @@
         </p:nvSpPr>
         <p:spPr>
           <a:xfrm rot="0">
-            <a:off x="8333642" y="3915166"/>
-            <a:ext cx="989352" cy="148114"/>
-          </a:xfrm>
-          <a:prstGeom prst="rect">
-            <a:avLst/>
-          </a:prstGeom>
-        </p:spPr>
-        <p:txBody>
-          <a:bodyPr anchor="t" rtlCol="false" tIns="0" lIns="0" bIns="0" rIns="0">
+            <a:off x="8384133" y="3915166"/>
+            <a:ext cx="888796" cy="148114"/>
+          </a:xfrm>
+          <a:prstGeom prst="rect">
+            <a:avLst/>
+          </a:prstGeom>
+        </p:spPr>
+        <p:txBody>
+          <a:bodyPr anchor="t" rtlCol="false" tIns="0" lIns="0" bIns="0" rIns="0" wrap="none">
             <a:spAutoFit/>
           </a:bodyPr>
           <a:lstStyle/>
@@ -4536,7 +4536,7 @@
                 <a:cs typeface="Noto Sans"/>
                 <a:sym typeface="Noto Sans"/>
               </a:rPr>
-              <a:t>5. rodapé da página</a:t>
+              <a:t>5. região principal</a:t>
             </a:r>
           </a:p>
         </p:txBody>
@@ -4549,15 +4549,15 @@
         </p:nvSpPr>
         <p:spPr>
           <a:xfrm rot="0">
-            <a:off x="10038245" y="3915166"/>
-            <a:ext cx="720442" cy="148114"/>
-          </a:xfrm>
-          <a:prstGeom prst="rect">
-            <a:avLst/>
-          </a:prstGeom>
-        </p:spPr>
-        <p:txBody>
-          <a:bodyPr anchor="t" rtlCol="false" tIns="0" lIns="0" bIns="0" rIns="0">
+            <a:off x="9903866" y="3915166"/>
+            <a:ext cx="989380" cy="148114"/>
+          </a:xfrm>
+          <a:prstGeom prst="rect">
+            <a:avLst/>
+          </a:prstGeom>
+        </p:spPr>
+        <p:txBody>
+          <a:bodyPr anchor="t" rtlCol="false" tIns="0" lIns="0" bIns="0" rIns="0" wrap="none">
             <a:spAutoFit/>
           </a:bodyPr>
           <a:lstStyle/>
@@ -4577,7 +4577,7 @@
                 <a:cs typeface="Noto Sans"/>
                 <a:sym typeface="Noto Sans"/>
               </a:rPr>
-              <a:t>6. item de lista</a:t>
+              <a:t>6. rodapé da página</a:t>
             </a:r>
           </a:p>
         </p:txBody>
@@ -4590,15 +4590,15 @@
         </p:nvSpPr>
         <p:spPr>
           <a:xfrm rot="0">
-            <a:off x="10038245" y="4555246"/>
-            <a:ext cx="720442" cy="148114"/>
-          </a:xfrm>
-          <a:prstGeom prst="rect">
-            <a:avLst/>
-          </a:prstGeom>
-        </p:spPr>
-        <p:txBody>
-          <a:bodyPr anchor="t" rtlCol="false" tIns="0" lIns="0" bIns="0" rIns="0">
+            <a:off x="10038283" y="4555246"/>
+            <a:ext cx="720547" cy="148114"/>
+          </a:xfrm>
+          <a:prstGeom prst="rect">
+            <a:avLst/>
+          </a:prstGeom>
+        </p:spPr>
+        <p:txBody>
+          <a:bodyPr anchor="t" rtlCol="false" tIns="0" lIns="0" bIns="0" rIns="0" wrap="none">
             <a:spAutoFit/>
           </a:bodyPr>
           <a:lstStyle/>
@@ -4631,15 +4631,15 @@
         </p:nvSpPr>
         <p:spPr>
           <a:xfrm rot="0">
-            <a:off x="9834115" y="3275086"/>
-            <a:ext cx="1135580" cy="148114"/>
-          </a:xfrm>
-          <a:prstGeom prst="rect">
-            <a:avLst/>
-          </a:prstGeom>
-        </p:spPr>
-        <p:txBody>
-          <a:bodyPr anchor="t" rtlCol="false" tIns="0" lIns="0" bIns="0" rIns="0">
+            <a:off x="10243108" y="3275086"/>
+            <a:ext cx="318211" cy="148114"/>
+          </a:xfrm>
+          <a:prstGeom prst="rect">
+            <a:avLst/>
+          </a:prstGeom>
+        </p:spPr>
+        <p:txBody>
+          <a:bodyPr anchor="t" rtlCol="false" tIns="0" lIns="0" bIns="0" rIns="0" wrap="none">
             <a:spAutoFit/>
           </a:bodyPr>
           <a:lstStyle/>
@@ -4659,7 +4659,7 @@
                 <a:cs typeface="Noto Sans"/>
                 <a:sym typeface="Noto Sans"/>
               </a:rPr>
-              <a:t>3. cabeçalho da página</a:t>
+              <a:t>3. lista</a:t>
             </a:r>
           </a:p>
         </p:txBody>
@@ -14036,14 +14036,14 @@
         <p:spPr>
           <a:xfrm rot="0">
             <a:off x="7543800" y="2858405"/>
-            <a:ext cx="1327090" cy="174755"/>
-          </a:xfrm>
-          <a:prstGeom prst="rect">
-            <a:avLst/>
-          </a:prstGeom>
-        </p:spPr>
-        <p:txBody>
-          <a:bodyPr anchor="t" rtlCol="false" tIns="0" lIns="0" bIns="0" rIns="0">
+            <a:ext cx="2194560" cy="174755"/>
+          </a:xfrm>
+          <a:prstGeom prst="rect">
+            <a:avLst/>
+          </a:prstGeom>
+        </p:spPr>
+        <p:txBody>
+          <a:bodyPr anchor="t" rtlCol="false" tIns="0" lIns="0" bIns="0" rIns="0" wrap="none">
             <a:spAutoFit/>
           </a:bodyPr>
           <a:lstStyle/>
@@ -14063,7 +14063,7 @@
                 <a:cs typeface="Noto Sans"/>
                 <a:sym typeface="Noto Sans"/>
               </a:rPr>
-              <a:t>WAVE · ASES · Python</a:t>
+              <a:t>WAVE · ASES · axe-core · Python</a:t>
             </a:r>
           </a:p>
         </p:txBody>
@@ -18755,7 +18755,7 @@
                 <a:cs typeface="Noto Sans Bold"/>
                 <a:sym typeface="Noto Sans Bold"/>
               </a:rPr>
-              <a:t>16 recursos corretos e 42 elementos estruturais. Os 4 erros vêm da Barra do Governo Federal, não do código do IFAL.</a:t>
+              <a:t>16 recursos corretos e 42 elementos estruturais. Três dos quatro erros vêm da Barra do Governo Federal, não do código do IFAL; o quarto não foi possível atribuir.</a:t>
             </a:r>
           </a:p>
         </p:txBody>
@@ -19158,67 +19158,6 @@
           </a:blipFill>
         </p:spPr>
       </p:sp>
-      <p:grpSp>
-        <p:nvGrpSpPr>
-          <p:cNvPr name="Group 4" id="4"/>
-          <p:cNvGrpSpPr/>
-          <p:nvPr/>
-        </p:nvGrpSpPr>
-        <p:grpSpPr>
-          <a:xfrm rot="0">
-            <a:off x="932764" y="2414178"/>
-            <a:ext cx="6144111" cy="2495140"/>
-            <a:chOff x="0" y="0"/>
-            <a:chExt cx="8192148" cy="3326854"/>
-          </a:xfrm>
-        </p:grpSpPr>
-        <p:sp>
-          <p:nvSpPr>
-            <p:cNvPr name="Freeform 5" id="5" descr="/mnt/data/original_render/p12.png"/>
-            <p:cNvSpPr/>
-            <p:nvPr/>
-          </p:nvSpPr>
-          <p:spPr>
-            <a:xfrm flipH="false" flipV="false" rot="0">
-              <a:off x="0" y="0"/>
-              <a:ext cx="8192135" cy="3326892"/>
-            </a:xfrm>
-            <a:custGeom>
-              <a:avLst/>
-              <a:gdLst/>
-              <a:ahLst/>
-              <a:cxnLst/>
-              <a:rect r="r" b="b" t="t" l="l"/>
-              <a:pathLst>
-                <a:path h="3326892" w="8192135">
-                  <a:moveTo>
-                    <a:pt x="0" y="0"/>
-                  </a:moveTo>
-                  <a:lnTo>
-                    <a:pt x="8192135" y="0"/>
-                  </a:lnTo>
-                  <a:lnTo>
-                    <a:pt x="8192135" y="3326892"/>
-                  </a:lnTo>
-                  <a:lnTo>
-                    <a:pt x="0" y="3326892"/>
-                  </a:lnTo>
-                  <a:lnTo>
-                    <a:pt x="0" y="0"/>
-                  </a:lnTo>
-                  <a:close/>
-                </a:path>
-              </a:pathLst>
-            </a:custGeom>
-            <a:blipFill>
-              <a:blip r:embed="rId6"/>
-              <a:stretch>
-                <a:fillRect l="0" t="-15" r="0" b="1"/>
-              </a:stretch>
-            </a:blipFill>
-          </p:spPr>
-        </p:sp>
-      </p:grpSp>
       <p:sp>
         <p:nvSpPr>
           <p:cNvPr name="Freeform 6" id="6"/>
@@ -19765,7 +19704,7 @@
         </p:nvSpPr>
         <p:spPr>
           <a:xfrm rot="0">
-            <a:off x="7970075" y="4681728"/>
+            <a:off x="7970075" y="4105656"/>
             <a:ext cx="777147" cy="539176"/>
           </a:xfrm>
           <a:prstGeom prst="rect">
@@ -19847,7 +19786,7 @@
         </p:nvSpPr>
         <p:spPr>
           <a:xfrm rot="0">
-            <a:off x="8850963" y="4224528"/>
+            <a:off x="8850963" y="3836889"/>
             <a:ext cx="1040159" cy="156143"/>
           </a:xfrm>
           <a:prstGeom prst="rect">
@@ -19888,7 +19827,7 @@
         </p:nvSpPr>
         <p:spPr>
           <a:xfrm rot="0">
-            <a:off x="8850963" y="3456432"/>
+            <a:off x="8850963" y="3260893"/>
             <a:ext cx="1047674" cy="156143"/>
           </a:xfrm>
           <a:prstGeom prst="rect">
@@ -19929,7 +19868,7 @@
         </p:nvSpPr>
         <p:spPr>
           <a:xfrm rot="0">
-            <a:off x="8850963" y="4992624"/>
+            <a:off x="8850963" y="4416552"/>
             <a:ext cx="1326785" cy="156143"/>
           </a:xfrm>
           <a:prstGeom prst="rect">
@@ -19970,7 +19909,7 @@
         </p:nvSpPr>
         <p:spPr>
           <a:xfrm rot="0">
-            <a:off x="8850963" y="2688336"/>
+            <a:off x="8850963" y="2684888"/>
             <a:ext cx="1672171" cy="156143"/>
           </a:xfrm>
           <a:prstGeom prst="rect">
@@ -20052,7 +19991,7 @@
         </p:nvSpPr>
         <p:spPr>
           <a:xfrm rot="0">
-            <a:off x="7927724" y="3913632"/>
+            <a:off x="7927724" y="3531073"/>
             <a:ext cx="777147" cy="539176"/>
           </a:xfrm>
           <a:prstGeom prst="rect">
@@ -20093,7 +20032,7 @@
         </p:nvSpPr>
         <p:spPr>
           <a:xfrm rot="0">
-            <a:off x="7979600" y="3145536"/>
+            <a:off x="7979600" y="2919636"/>
             <a:ext cx="777147" cy="539176"/>
           </a:xfrm>
           <a:prstGeom prst="rect">
@@ -20134,7 +20073,7 @@
         </p:nvSpPr>
         <p:spPr>
           <a:xfrm rot="0">
-            <a:off x="7907681" y="2377440"/>
+            <a:off x="7907681" y="2379072"/>
             <a:ext cx="777147" cy="539176"/>
           </a:xfrm>
           <a:prstGeom prst="rect">
@@ -20167,6 +20106,30 @@
           </a:p>
         </p:txBody>
       </p:sp>
+      <p:pic>
+        <p:nvPicPr>
+          <p:cNvPr id="30" name="Picture 29" descr="13b-carrossel-recorte-botoes.png"/>
+          <p:cNvPicPr>
+            <a:picLocks noChangeAspect="1"/>
+          </p:cNvPicPr>
+          <p:nvPr/>
+        </p:nvPicPr>
+        <p:blipFill>
+          <a:blip r:embed="rId11"/>
+          <a:stretch>
+            <a:fillRect/>
+          </a:stretch>
+        </p:blipFill>
+        <p:spPr>
+          <a:xfrm>
+            <a:off x="932764" y="2535864"/>
+            <a:ext cx="6144111" cy="2251768"/>
+          </a:xfrm>
+          <a:prstGeom prst="rect">
+            <a:avLst/>
+          </a:prstGeom>
+        </p:spPr>
+      </p:pic>
     </p:spTree>
   </p:cSld>
   <p:clrMapOvr>
@@ -21043,14 +21006,14 @@
         <p:spPr>
           <a:xfrm rot="0">
             <a:off x="7269128" y="4238644"/>
-            <a:ext cx="1559147" cy="174755"/>
-          </a:xfrm>
-          <a:prstGeom prst="rect">
-            <a:avLst/>
-          </a:prstGeom>
-        </p:spPr>
-        <p:txBody>
-          <a:bodyPr anchor="t" rtlCol="false" tIns="0" lIns="0" bIns="0" rIns="0">
+            <a:ext cx="2103120" cy="174755"/>
+          </a:xfrm>
+          <a:prstGeom prst="rect">
+            <a:avLst/>
+          </a:prstGeom>
+        </p:spPr>
+        <p:txBody>
+          <a:bodyPr anchor="t" rtlCol="false" tIns="0" lIns="0" bIns="0" rIns="0" wrap="square">
             <a:spAutoFit/>
           </a:bodyPr>
           <a:lstStyle/>
@@ -21070,7 +21033,7 @@
                 <a:cs typeface="Noto Sans Bold"/>
                 <a:sym typeface="Noto Sans Bold"/>
               </a:rPr>
-              <a:t>pior razão de contraste</a:t>
+              <a:t>pior razão, medida por amostragem de pixels</a:t>
             </a:r>
           </a:p>
         </p:txBody>
@@ -21111,7 +21074,7 @@
                 <a:cs typeface="Noto Sans Bold"/>
                 <a:sym typeface="Noto Sans Bold"/>
               </a:rPr>
-              <a:t>reprovações de contraste confirmadas</a:t>
+              <a:t>reprovações confirmadas por amostragem de pixels</a:t>
             </a:r>
           </a:p>
         </p:txBody>
